--- a/builder/assets/reference-pages/complex-org-chart.pptx
+++ b/builder/assets/reference-pages/complex-org-chart.pptx
@@ -1784,7 +1784,7 @@
                   <a:srgbClr val="172033"/>
                 </a:solidFill>
               </a:rPr>
-              <a:t>公司组织架构</a:t>
+              <a:t>Company organizational structure</a:t>
             </a:r>
           </a:p>
         </p:txBody>
@@ -1838,7 +1838,7 @@
                   <a:srgbClr val="172033"/>
                 </a:solidFill>
               </a:rPr>
-              <a:t>总经理</a:t>
+              <a:t>general manager</a:t>
             </a:r>
           </a:p>
         </p:txBody>
@@ -1892,7 +1892,7 @@
                   <a:srgbClr val="172033"/>
                 </a:solidFill>
               </a:rPr>
-              <a:t>销售部</a:t>
+              <a:t>Sales Department</a:t>
             </a:r>
           </a:p>
         </p:txBody>
@@ -1946,7 +1946,7 @@
                   <a:srgbClr val="172033"/>
                 </a:solidFill>
               </a:rPr>
-              <a:t>品牌部</a:t>
+              <a:t>Brand Department</a:t>
             </a:r>
           </a:p>
         </p:txBody>
@@ -2000,7 +2000,7 @@
                   <a:srgbClr val="172033"/>
                 </a:solidFill>
               </a:rPr>
-              <a:t>供应链部</a:t>
+              <a:t>Supply Chain Department</a:t>
             </a:r>
           </a:p>
         </p:txBody>
@@ -2054,7 +2054,7 @@
                   <a:srgbClr val="172033"/>
                 </a:solidFill>
               </a:rPr>
-              <a:t>财务部</a:t>
+              <a:t>Finance Department</a:t>
             </a:r>
           </a:p>
         </p:txBody>
@@ -2108,7 +2108,7 @@
                   <a:srgbClr val="172033"/>
                 </a:solidFill>
               </a:rPr>
-              <a:t>人力资源部</a:t>
+              <a:t>Human Resources Department</a:t>
             </a:r>
             <a:endParaRPr sz="1600" b="1" dirty="0">
               <a:solidFill>
@@ -2167,7 +2167,7 @@
                   <a:srgbClr val="172033"/>
                 </a:solidFill>
               </a:rPr>
-              <a:t>华东大区</a:t>
+              <a:t>East China Region</a:t>
             </a:r>
           </a:p>
         </p:txBody>
@@ -2221,7 +2221,7 @@
                   <a:srgbClr val="172033"/>
                 </a:solidFill>
               </a:rPr>
-              <a:t>华南大区</a:t>
+              <a:t>South China Region</a:t>
             </a:r>
           </a:p>
         </p:txBody>
@@ -2275,7 +2275,7 @@
                   <a:srgbClr val="172033"/>
                 </a:solidFill>
               </a:rPr>
-              <a:t>华北大区</a:t>
+              <a:t>North China Region</a:t>
             </a:r>
           </a:p>
         </p:txBody>
@@ -2329,7 +2329,7 @@
                   <a:srgbClr val="172033"/>
                 </a:solidFill>
               </a:rPr>
-              <a:t>西部大区</a:t>
+              <a:t>Western Region</a:t>
             </a:r>
           </a:p>
         </p:txBody>
@@ -2383,7 +2383,7 @@
                   <a:srgbClr val="172033"/>
                 </a:solidFill>
               </a:rPr>
-              <a:t>中部大区</a:t>
+              <a:t>central region</a:t>
             </a:r>
           </a:p>
         </p:txBody>
@@ -2437,7 +2437,7 @@
                   <a:srgbClr val="172033"/>
                 </a:solidFill>
               </a:rPr>
-              <a:t>华东销售管理部</a:t>
+              <a:t>East China Sales Management Department</a:t>
             </a:r>
           </a:p>
         </p:txBody>
@@ -2491,7 +2491,7 @@
                   <a:srgbClr val="172033"/>
                 </a:solidFill>
               </a:rPr>
-              <a:t>华东销售经理</a:t>
+              <a:t>East China Sales Manager</a:t>
             </a:r>
           </a:p>
         </p:txBody>
@@ -2545,7 +2545,7 @@
                   <a:srgbClr val="172033"/>
                 </a:solidFill>
               </a:rPr>
-              <a:t>华东销售主管</a:t>
+              <a:t>East China Sales Manager</a:t>
             </a:r>
           </a:p>
         </p:txBody>
@@ -2599,7 +2599,7 @@
                   <a:srgbClr val="172033"/>
                 </a:solidFill>
               </a:rPr>
-              <a:t>华东销售代表</a:t>
+              <a:t>East China Sales Representative</a:t>
             </a:r>
           </a:p>
         </p:txBody>
@@ -2653,7 +2653,7 @@
                   <a:srgbClr val="172033"/>
                 </a:solidFill>
               </a:rPr>
-              <a:t>华东销售负责人（在岗）</a:t>
+              <a:t>East China Sales Manager (on duty)</a:t>
             </a:r>
           </a:p>
         </p:txBody>
@@ -2707,7 +2707,7 @@
                   <a:srgbClr val="172033"/>
                 </a:solidFill>
               </a:rPr>
-              <a:t>华东大客户部</a:t>
+              <a:t>East China Key Account Department</a:t>
             </a:r>
           </a:p>
         </p:txBody>
@@ -2761,7 +2761,7 @@
                   <a:srgbClr val="172033"/>
                 </a:solidFill>
               </a:rPr>
-              <a:t>华东品牌组</a:t>
+              <a:t>East China Brand Group</a:t>
             </a:r>
           </a:p>
         </p:txBody>
@@ -2815,7 +2815,7 @@
                   <a:srgbClr val="172033"/>
                 </a:solidFill>
               </a:rPr>
-              <a:t>区域品牌经理</a:t>
+              <a:t>Regional Brand Manager</a:t>
             </a:r>
           </a:p>
         </p:txBody>
@@ -2869,7 +2869,7 @@
                   <a:srgbClr val="172033"/>
                 </a:solidFill>
               </a:rPr>
-              <a:t>华东品牌专员</a:t>
+              <a:t>East China Brand Specialist</a:t>
             </a:r>
           </a:p>
         </p:txBody>
@@ -2923,7 +2923,7 @@
                   <a:srgbClr val="172033"/>
                 </a:solidFill>
               </a:rPr>
-              <a:t>华南销售经理</a:t>
+              <a:t>South China Sales Manager</a:t>
             </a:r>
           </a:p>
         </p:txBody>
@@ -2977,7 +2977,7 @@
                   <a:srgbClr val="172033"/>
                 </a:solidFill>
               </a:rPr>
-              <a:t>华北销售经理</a:t>
+              <a:t>North China Sales Manager</a:t>
             </a:r>
           </a:p>
         </p:txBody>
@@ -3031,7 +3031,7 @@
                   <a:srgbClr val="172033"/>
                 </a:solidFill>
               </a:rPr>
-              <a:t>品牌总监</a:t>
+              <a:t>Brand Director</a:t>
             </a:r>
           </a:p>
         </p:txBody>
@@ -3085,7 +3085,7 @@
                   <a:srgbClr val="172033"/>
                 </a:solidFill>
               </a:rPr>
-              <a:t>品牌策略经理</a:t>
+              <a:t>Brand Strategy Manager</a:t>
             </a:r>
             <a:endParaRPr sz="1400" b="0" dirty="0">
               <a:solidFill>
@@ -3144,7 +3144,7 @@
                   <a:srgbClr val="172033"/>
                 </a:solidFill>
               </a:rPr>
-              <a:t>供应计划经理</a:t>
+              <a:t>supply planning manager</a:t>
             </a:r>
             <a:endParaRPr sz="1400" b="0" dirty="0">
               <a:solidFill>
@@ -3203,7 +3203,7 @@
                   <a:srgbClr val="172033"/>
                 </a:solidFill>
               </a:rPr>
-              <a:t>采购经理</a:t>
+              <a:t>purchasing manager</a:t>
             </a:r>
           </a:p>
         </p:txBody>
@@ -3257,7 +3257,7 @@
                   <a:srgbClr val="172033"/>
                 </a:solidFill>
               </a:rPr>
-              <a:t>财务经理</a:t>
+              <a:t>financial manager</a:t>
             </a:r>
           </a:p>
         </p:txBody>
@@ -3311,7 +3311,7 @@
                   <a:srgbClr val="172033"/>
                 </a:solidFill>
               </a:rPr>
-              <a:t>人力资源经理</a:t>
+              <a:t>human resources manager</a:t>
             </a:r>
             <a:endParaRPr sz="1400" b="0" dirty="0">
               <a:solidFill>
@@ -3410,7 +3410,7 @@
                   <a:srgbClr val="172033"/>
                 </a:solidFill>
               </a:rPr>
-              <a:t>华东销售经理</a:t>
+              <a:t>East China Sales Manager</a:t>
             </a:r>
           </a:p>
         </p:txBody>
@@ -3464,7 +3464,7 @@
                   <a:srgbClr val="172033"/>
                 </a:solidFill>
               </a:rPr>
-              <a:t>区域品牌经理</a:t>
+              <a:t>Regional Brand Manager</a:t>
             </a:r>
             <a:endParaRPr sz="1400" b="0" dirty="0">
               <a:solidFill>
@@ -3523,7 +3523,7 @@
                   <a:srgbClr val="172033"/>
                 </a:solidFill>
               </a:rPr>
-              <a:t>供应计划经理</a:t>
+              <a:t>supply planning manager</a:t>
             </a:r>
           </a:p>
         </p:txBody>
@@ -3573,7 +3573,7 @@
                   <a:srgbClr val="E8872D"/>
                 </a:solidFill>
               </a:rPr>
-              <a:t>新品上市项目组</a:t>
+              <a:t>New product launch project team</a:t>
             </a:r>
             <a:endParaRPr sz="1600" b="1" dirty="0">
               <a:solidFill>
@@ -3645,7 +3645,7 @@
                   <a:srgbClr val="697386"/>
                 </a:solidFill>
               </a:rPr>
-              <a:t>实线：直接汇报</a:t>
+              <a:t>Solid line: direct reporting</a:t>
             </a:r>
             <a:r>
               <a:rPr sz="1200" b="0" dirty="0">
@@ -3661,7 +3661,7 @@
                   <a:srgbClr val="697386"/>
                 </a:solidFill>
               </a:rPr>
-              <a:t>虚线：职能管理</a:t>
+              <a:t>Dotted line: functional management</a:t>
             </a:r>
             <a:r>
               <a:rPr sz="1200" b="0" dirty="0">
@@ -3677,7 +3677,7 @@
                   <a:srgbClr val="697386"/>
                 </a:solidFill>
               </a:rPr>
-              <a:t>临时项目成员</a:t>
+              <a:t>Temporary project member</a:t>
             </a:r>
             <a:endParaRPr sz="1200" b="0" dirty="0">
               <a:solidFill>
